--- a/Sunum_TMDB_Hasilat_Tahmin.pptx
+++ b/Sunum_TMDB_Hasilat_Tahmin.pptx
@@ -11,7 +11,6 @@
     <p:sldId id="259" r:id="rId5"/>
     <p:sldId id="260" r:id="rId6"/>
     <p:sldId id="261" r:id="rId7"/>
-    <p:sldId id="262" r:id="rId8"/>
   </p:sldIdLst>
   <p:sldSz cx="12188825" cy="6858000"/>
   <p:notesSz cx="6858000" cy="9144000"/>
@@ -308,7 +307,7 @@
           <a:p>
             <a:fld id="{5BCAD085-E8A6-8845-BD4E-CB4CCA059FC4}" type="datetimeFigureOut">
               <a:rPr lang="en-US" smtClean="0"/>
-              <a:t>5/2/2026</a:t>
+              <a:t>5/4/2026</a:t>
             </a:fld>
             <a:endParaRPr lang="en-US"/>
           </a:p>
@@ -476,7 +475,7 @@
           <a:p>
             <a:fld id="{5BCAD085-E8A6-8845-BD4E-CB4CCA059FC4}" type="datetimeFigureOut">
               <a:rPr lang="en-US" smtClean="0"/>
-              <a:t>5/2/2026</a:t>
+              <a:t>5/4/2026</a:t>
             </a:fld>
             <a:endParaRPr lang="en-US"/>
           </a:p>
@@ -654,7 +653,7 @@
           <a:p>
             <a:fld id="{5BCAD085-E8A6-8845-BD4E-CB4CCA059FC4}" type="datetimeFigureOut">
               <a:rPr lang="en-US" smtClean="0"/>
-              <a:t>5/2/2026</a:t>
+              <a:t>5/4/2026</a:t>
             </a:fld>
             <a:endParaRPr lang="en-US"/>
           </a:p>
@@ -822,7 +821,7 @@
           <a:p>
             <a:fld id="{5BCAD085-E8A6-8845-BD4E-CB4CCA059FC4}" type="datetimeFigureOut">
               <a:rPr lang="en-US" smtClean="0"/>
-              <a:t>5/2/2026</a:t>
+              <a:t>5/4/2026</a:t>
             </a:fld>
             <a:endParaRPr lang="en-US"/>
           </a:p>
@@ -1067,7 +1066,7 @@
           <a:p>
             <a:fld id="{5BCAD085-E8A6-8845-BD4E-CB4CCA059FC4}" type="datetimeFigureOut">
               <a:rPr lang="en-US" smtClean="0"/>
-              <a:t>5/2/2026</a:t>
+              <a:t>5/4/2026</a:t>
             </a:fld>
             <a:endParaRPr lang="en-US"/>
           </a:p>
@@ -1352,7 +1351,7 @@
           <a:p>
             <a:fld id="{5BCAD085-E8A6-8845-BD4E-CB4CCA059FC4}" type="datetimeFigureOut">
               <a:rPr lang="en-US" smtClean="0"/>
-              <a:t>5/2/2026</a:t>
+              <a:t>5/4/2026</a:t>
             </a:fld>
             <a:endParaRPr lang="en-US"/>
           </a:p>
@@ -1771,7 +1770,7 @@
           <a:p>
             <a:fld id="{5BCAD085-E8A6-8845-BD4E-CB4CCA059FC4}" type="datetimeFigureOut">
               <a:rPr lang="en-US" smtClean="0"/>
-              <a:t>5/2/2026</a:t>
+              <a:t>5/4/2026</a:t>
             </a:fld>
             <a:endParaRPr lang="en-US"/>
           </a:p>
@@ -1888,7 +1887,7 @@
           <a:p>
             <a:fld id="{5BCAD085-E8A6-8845-BD4E-CB4CCA059FC4}" type="datetimeFigureOut">
               <a:rPr lang="en-US" smtClean="0"/>
-              <a:t>5/2/2026</a:t>
+              <a:t>5/4/2026</a:t>
             </a:fld>
             <a:endParaRPr lang="en-US"/>
           </a:p>
@@ -1983,7 +1982,7 @@
           <a:p>
             <a:fld id="{5BCAD085-E8A6-8845-BD4E-CB4CCA059FC4}" type="datetimeFigureOut">
               <a:rPr lang="en-US" smtClean="0"/>
-              <a:t>5/2/2026</a:t>
+              <a:t>5/4/2026</a:t>
             </a:fld>
             <a:endParaRPr lang="en-US"/>
           </a:p>
@@ -2258,7 +2257,7 @@
           <a:p>
             <a:fld id="{5BCAD085-E8A6-8845-BD4E-CB4CCA059FC4}" type="datetimeFigureOut">
               <a:rPr lang="en-US" smtClean="0"/>
-              <a:t>5/2/2026</a:t>
+              <a:t>5/4/2026</a:t>
             </a:fld>
             <a:endParaRPr lang="en-US"/>
           </a:p>
@@ -2510,7 +2509,7 @@
           <a:p>
             <a:fld id="{5BCAD085-E8A6-8845-BD4E-CB4CCA059FC4}" type="datetimeFigureOut">
               <a:rPr lang="en-US" smtClean="0"/>
-              <a:t>5/2/2026</a:t>
+              <a:t>5/4/2026</a:t>
             </a:fld>
             <a:endParaRPr lang="en-US"/>
           </a:p>
@@ -2721,7 +2720,7 @@
           <a:p>
             <a:fld id="{5BCAD085-E8A6-8845-BD4E-CB4CCA059FC4}" type="datetimeFigureOut">
               <a:rPr lang="en-US" smtClean="0"/>
-              <a:t>5/2/2026</a:t>
+              <a:t>5/4/2026</a:t>
             </a:fld>
             <a:endParaRPr lang="en-US"/>
           </a:p>
@@ -5150,450 +5149,6 @@
           </a:prstGeom>
         </p:spPr>
       </p:pic>
-    </p:spTree>
-  </p:cSld>
-  <p:clrMapOvr>
-    <a:masterClrMapping/>
-  </p:clrMapOvr>
-</p:sld>
-</file>
-
-<file path=ppt/slides/slide7.xml><?xml version="1.0" encoding="utf-8"?>
-<p:sld xmlns:a="http://schemas.openxmlformats.org/drawingml/2006/main" xmlns:r="http://schemas.openxmlformats.org/officeDocument/2006/relationships" xmlns:p="http://schemas.openxmlformats.org/presentationml/2006/main">
-  <p:cSld>
-    <p:bg>
-      <p:bgPr>
-        <a:solidFill>
-          <a:srgbClr val="0F121A"/>
-        </a:solidFill>
-        <a:effectLst/>
-      </p:bgPr>
-    </p:bg>
-    <p:spTree>
-      <p:nvGrpSpPr>
-        <p:cNvPr id="1" name=""/>
-        <p:cNvGrpSpPr/>
-        <p:nvPr/>
-      </p:nvGrpSpPr>
-      <p:grpSpPr>
-        <a:xfrm>
-          <a:off x="0" y="0"/>
-          <a:ext cx="0" cy="0"/>
-          <a:chOff x="0" y="0"/>
-          <a:chExt cx="0" cy="0"/>
-        </a:xfrm>
-      </p:grpSpPr>
-      <p:sp>
-        <p:nvSpPr>
-          <p:cNvPr id="2" name="TextBox 1"/>
-          <p:cNvSpPr txBox="1"/>
-          <p:nvPr/>
-        </p:nvSpPr>
-        <p:spPr>
-          <a:xfrm>
-            <a:off x="182880" y="91440"/>
-            <a:ext cx="8686800" cy="548640"/>
-          </a:xfrm>
-          <a:prstGeom prst="rect">
-            <a:avLst/>
-          </a:prstGeom>
-          <a:noFill/>
-        </p:spPr>
-        <p:txBody>
-          <a:bodyPr wrap="none">
-            <a:spAutoFit/>
-          </a:bodyPr>
-          <a:lstStyle/>
-          <a:p>
-            <a:pPr>
-              <a:defRPr sz="3000" b="1">
-                <a:solidFill>
-                  <a:srgbClr val="48CAE4"/>
-                </a:solidFill>
-              </a:defRPr>
-            </a:pPr>
-            <a:r>
-              <a:t>Genel Özet, Sonuçlar ve Çıkarımlar</a:t>
-            </a:r>
-          </a:p>
-        </p:txBody>
-      </p:sp>
-      <p:sp>
-        <p:nvSpPr>
-          <p:cNvPr id="3" name="TextBox 2"/>
-          <p:cNvSpPr txBox="1"/>
-          <p:nvPr/>
-        </p:nvSpPr>
-        <p:spPr>
-          <a:xfrm>
-            <a:off x="274320" y="777240"/>
-            <a:ext cx="5486400" cy="5943600"/>
-          </a:xfrm>
-          <a:prstGeom prst="rect">
-            <a:avLst/>
-          </a:prstGeom>
-          <a:noFill/>
-        </p:spPr>
-        <p:txBody>
-          <a:bodyPr wrap="square">
-            <a:spAutoFit/>
-          </a:bodyPr>
-          <a:lstStyle/>
-          <a:p>
-            <a:pPr>
-              <a:defRPr sz="1500" b="1">
-                <a:solidFill>
-                  <a:srgbClr val="FFD166"/>
-                </a:solidFill>
-              </a:defRPr>
-            </a:pPr>
-            <a:r>
-              <a:t>Model Performansı</a:t>
-            </a:r>
-          </a:p>
-          <a:p>
-            <a:pPr>
-              <a:defRPr sz="1300" b="1">
-                <a:solidFill>
-                  <a:srgbClr val="64DD96"/>
-                </a:solidFill>
-              </a:defRPr>
-            </a:pPr>
-            <a:r>
-              <a:t>• R² 0.8497 — hasılat değişiminin %85'ini açıklıyor.</a:t>
-            </a:r>
-          </a:p>
-          <a:p>
-            <a:pPr>
-              <a:defRPr sz="1300" b="0">
-                <a:solidFill>
-                  <a:srgbClr val="E6EBF5"/>
-                </a:solidFill>
-              </a:defRPr>
-            </a:pPr>
-            <a:r>
-              <a:t>• MAE $37.8M seviyesinde; büyük stüdyolar için</a:t>
-            </a:r>
-          </a:p>
-          <a:p>
-            <a:pPr>
-              <a:defRPr sz="1300" b="0">
-                <a:solidFill>
-                  <a:srgbClr val="E6EBF5"/>
-                </a:solidFill>
-              </a:defRPr>
-            </a:pPr>
-            <a:r>
-              <a:t>  kabul edilebilir bir tolerans aralığı.</a:t>
-            </a:r>
-          </a:p>
-          <a:p>
-            <a:pPr>
-              <a:defRPr sz="1200" b="0">
-                <a:solidFill>
-                  <a:srgbClr val="A0AAC3"/>
-                </a:solidFill>
-              </a:defRPr>
-            </a:pPr>
-            <a:r>
-              <a:t>• MAPE %50.90 — veri setindeki sağ çarpıklıktan</a:t>
-            </a:r>
-          </a:p>
-          <a:p>
-            <a:pPr>
-              <a:defRPr sz="1200" b="0">
-                <a:solidFill>
-                  <a:srgbClr val="A0AAC3"/>
-                </a:solidFill>
-              </a:defRPr>
-            </a:pPr>
-            <a:r>
-              <a:t>  (blockbuster aykırı değerler) kaynaklanıyor.</a:t>
-            </a:r>
-          </a:p>
-          <a:p>
-            <a:pPr>
-              <a:defRPr sz="1300" b="0">
-                <a:solidFill>
-                  <a:srgbClr val="E6EBF5"/>
-                </a:solidFill>
-              </a:defRPr>
-            </a:pPr>
-            <a:r>
-              <a:t>• En önemli değişkenler: budget &gt; vote_count &gt; popularity</a:t>
-            </a:r>
-          </a:p>
-          <a:p>
-            <a:pPr>
-              <a:defRPr sz="1300" b="0">
-                <a:solidFill>
-                  <a:srgbClr val="A0AAC3"/>
-                </a:solidFill>
-              </a:defRPr>
-            </a:pPr>
-            <a:endParaRPr/>
-          </a:p>
-          <a:p>
-            <a:pPr>
-              <a:defRPr sz="1500" b="1">
-                <a:solidFill>
-                  <a:srgbClr val="FFD166"/>
-                </a:solidFill>
-              </a:defRPr>
-            </a:pPr>
-            <a:r>
-              <a:t>Kritik Bulgular</a:t>
-            </a:r>
-          </a:p>
-          <a:p>
-            <a:pPr>
-              <a:defRPr sz="1300" b="0">
-                <a:solidFill>
-                  <a:srgbClr val="E6EBF5"/>
-                </a:solidFill>
-              </a:defRPr>
-            </a:pPr>
-            <a:r>
-              <a:t>• Bütçe kâr garantisi değil, ancak risk azaltıcıdır.</a:t>
-            </a:r>
-          </a:p>
-          <a:p>
-            <a:pPr>
-              <a:defRPr sz="1300" b="1">
-                <a:solidFill>
-                  <a:srgbClr val="64DD96"/>
-                </a:solidFill>
-              </a:defRPr>
-            </a:pPr>
-            <a:r>
-              <a:t>• Yüksek rating (+7) → ortalama hasılat 4x artıyor.</a:t>
-            </a:r>
-          </a:p>
-          <a:p>
-            <a:pPr>
-              <a:defRPr sz="1300" b="0">
-                <a:solidFill>
-                  <a:srgbClr val="E6EBF5"/>
-                </a:solidFill>
-              </a:defRPr>
-            </a:pPr>
-            <a:r>
-              <a:t>• Haziran ayı peak sezonu — Animasyon/Macera ideal.</a:t>
-            </a:r>
-          </a:p>
-          <a:p>
-            <a:pPr>
-              <a:defRPr sz="1300" b="0">
-                <a:solidFill>
-                  <a:srgbClr val="E6EBF5"/>
-                </a:solidFill>
-              </a:defRPr>
-            </a:pPr>
-            <a:r>
-              <a:t>• Warner Bros., Disney ve Universal pazar liderliği</a:t>
-            </a:r>
-          </a:p>
-          <a:p>
-            <a:pPr>
-              <a:defRPr sz="1200" b="0">
-                <a:solidFill>
-                  <a:srgbClr val="A0AAC3"/>
-                </a:solidFill>
-              </a:defRPr>
-            </a:pPr>
-            <a:r>
-              <a:t>  franchise varlığıyla sürdürülebilir hale gelmiştir.</a:t>
-            </a:r>
-          </a:p>
-        </p:txBody>
-      </p:sp>
-      <p:sp>
-        <p:nvSpPr>
-          <p:cNvPr id="4" name="TextBox 3"/>
-          <p:cNvSpPr txBox="1"/>
-          <p:nvPr/>
-        </p:nvSpPr>
-        <p:spPr>
-          <a:xfrm>
-            <a:off x="5943600" y="777240"/>
-            <a:ext cx="5943600" cy="5943600"/>
-          </a:xfrm>
-          <a:prstGeom prst="rect">
-            <a:avLst/>
-          </a:prstGeom>
-          <a:noFill/>
-        </p:spPr>
-        <p:txBody>
-          <a:bodyPr wrap="square">
-            <a:spAutoFit/>
-          </a:bodyPr>
-          <a:lstStyle/>
-          <a:p>
-            <a:pPr>
-              <a:defRPr sz="1500" b="1">
-                <a:solidFill>
-                  <a:srgbClr val="FFD166"/>
-                </a:solidFill>
-              </a:defRPr>
-            </a:pPr>
-            <a:r>
-              <a:t>İş Değeri &amp; Uygulanabilirlik</a:t>
-            </a:r>
-          </a:p>
-          <a:p>
-            <a:pPr>
-              <a:defRPr sz="1300" b="0">
-                <a:solidFill>
-                  <a:srgbClr val="E6EBF5"/>
-                </a:solidFill>
-              </a:defRPr>
-            </a:pPr>
-            <a:r>
-              <a:t>• Stüdyolar bu modeli bütçe onay sürecinde kullanabilir.</a:t>
-            </a:r>
-          </a:p>
-          <a:p>
-            <a:pPr>
-              <a:defRPr sz="1300" b="0">
-                <a:solidFill>
-                  <a:srgbClr val="E6EBF5"/>
-                </a:solidFill>
-              </a:defRPr>
-            </a:pPr>
-            <a:r>
-              <a:t>• Oyuncu/yönetmen seçimi hasılat tahminine entegre edilebilir.</a:t>
-            </a:r>
-          </a:p>
-          <a:p>
-            <a:pPr>
-              <a:defRPr sz="1300" b="0">
-                <a:solidFill>
-                  <a:srgbClr val="E6EBF5"/>
-                </a:solidFill>
-              </a:defRPr>
-            </a:pPr>
-            <a:r>
-              <a:t>• Genre + release timing optimizasyonu yapılabilir.</a:t>
-            </a:r>
-          </a:p>
-          <a:p>
-            <a:pPr>
-              <a:defRPr sz="1300" b="0">
-                <a:solidFill>
-                  <a:srgbClr val="A0AAC3"/>
-                </a:solidFill>
-              </a:defRPr>
-            </a:pPr>
-            <a:endParaRPr/>
-          </a:p>
-          <a:p>
-            <a:pPr>
-              <a:defRPr sz="1500" b="1">
-                <a:solidFill>
-                  <a:srgbClr val="FFD166"/>
-                </a:solidFill>
-              </a:defRPr>
-            </a:pPr>
-            <a:r>
-              <a:t>Geliştirme Yönleri</a:t>
-            </a:r>
-          </a:p>
-          <a:p>
-            <a:pPr>
-              <a:defRPr sz="1300" b="0">
-                <a:solidFill>
-                  <a:srgbClr val="E6EBF5"/>
-                </a:solidFill>
-              </a:defRPr>
-            </a:pPr>
-            <a:r>
-              <a:t>• NLP ile poster/fragman duygu analizi eklenebilir.</a:t>
-            </a:r>
-          </a:p>
-          <a:p>
-            <a:pPr>
-              <a:defRPr sz="1300" b="0">
-                <a:solidFill>
-                  <a:srgbClr val="E6EBF5"/>
-                </a:solidFill>
-              </a:defRPr>
-            </a:pPr>
-            <a:r>
-              <a:t>• MAPE'yi düşürmek için log-transform hedef değişken.</a:t>
-            </a:r>
-          </a:p>
-          <a:p>
-            <a:pPr>
-              <a:defRPr sz="1300" b="0">
-                <a:solidFill>
-                  <a:srgbClr val="E6EBF5"/>
-                </a:solidFill>
-              </a:defRPr>
-            </a:pPr>
-            <a:r>
-              <a:t>• Rekabetçi haftalık vizyona giren film sayısı verisi.</a:t>
-            </a:r>
-          </a:p>
-          <a:p>
-            <a:pPr>
-              <a:defRPr sz="1300" b="0">
-                <a:solidFill>
-                  <a:srgbClr val="A0AAC3"/>
-                </a:solidFill>
-              </a:defRPr>
-            </a:pPr>
-            <a:endParaRPr/>
-          </a:p>
-          <a:p>
-            <a:pPr>
-              <a:defRPr sz="1500" b="1">
-                <a:solidFill>
-                  <a:srgbClr val="FFD166"/>
-                </a:solidFill>
-              </a:defRPr>
-            </a:pPr>
-            <a:r>
-              <a:t>Donanım &amp; Teknik Altyapı</a:t>
-            </a:r>
-          </a:p>
-          <a:p>
-            <a:pPr>
-              <a:defRPr sz="1300" b="0">
-                <a:solidFill>
-                  <a:srgbClr val="E6EBF5"/>
-                </a:solidFill>
-              </a:defRPr>
-            </a:pPr>
-            <a:r>
-              <a:t>• NVIDIA RTX 4050 GPU ile GPU-hızlandırmalı XGBoost.</a:t>
-            </a:r>
-          </a:p>
-          <a:p>
-            <a:pPr>
-              <a:defRPr sz="1300" b="0">
-                <a:solidFill>
-                  <a:srgbClr val="E6EBF5"/>
-                </a:solidFill>
-              </a:defRPr>
-            </a:pPr>
-            <a:r>
-              <a:t>• MS SQL Server + Python (pandas, sklearn, xgboost).</a:t>
-            </a:r>
-          </a:p>
-          <a:p>
-            <a:pPr>
-              <a:defRPr sz="1300" b="0">
-                <a:solidFill>
-                  <a:srgbClr val="64DD96"/>
-                </a:solidFill>
-              </a:defRPr>
-            </a:pPr>
-            <a:r>
-              <a:t>• Model .json formatında kaydedildi, deploy'a hazır.</a:t>
-            </a:r>
-          </a:p>
-        </p:txBody>
-      </p:sp>
     </p:spTree>
   </p:cSld>
   <p:clrMapOvr>
